--- a/static/presentations/tiya-applied-ai/downloads/day2-slides.pptx
+++ b/static/presentations/tiya-applied-ai/downloads/day2-slides.pptx
@@ -19512,7 +19512,7 @@
                 </a:solidFill>
                 <a:latin typeface="Roboto"/>
               </a:rPr>
-              <a:t>8:30</a:t>
+              <a:t>8:50</a:t>
             </a:r>
           </a:p>
         </p:txBody>
@@ -19590,7 +19590,7 @@
                 </a:solidFill>
                 <a:latin typeface="Roboto"/>
               </a:rPr>
-              <a:t>105 min</a:t>
+              <a:t>85 min</a:t>
             </a:r>
           </a:p>
         </p:txBody>
